--- a/boletim/Boletim Mensal do Mercado de Trabalho.pptx
+++ b/boletim/Boletim Mensal do Mercado de Trabalho.pptx
@@ -132,23 +132,31 @@
 </p:presentation>
 </file>
 
+<file path=ppt/revisionInfo.xml><?xml version="1.0" encoding="utf-8"?>
+<p1510:revInfo xmlns:a="http://schemas.openxmlformats.org/drawingml/2006/main" xmlns:r="http://schemas.openxmlformats.org/officeDocument/2006/relationships" xmlns:p1510="http://schemas.microsoft.com/office/powerpoint/2015/10/main">
+  <p1510:revLst>
+    <p1510:client id="{4395D9C9-258F-4F37-A746-01427D995056}" v="4" dt="2026-04-27T12:25:27.363"/>
+  </p1510:revLst>
+</p1510:revInfo>
+</file>
+
 <file path=ppt/changesInfos/changesInfo1.xml><?xml version="1.0" encoding="utf-8"?>
 <pc:chgInfo xmlns:a="http://schemas.openxmlformats.org/drawingml/2006/main" xmlns:r="http://schemas.openxmlformats.org/officeDocument/2006/relationships" xmlns:ac="http://schemas.microsoft.com/office/drawing/2013/main/command" xmlns:pc="http://schemas.microsoft.com/office/powerpoint/2013/main/command">
   <pc:docChgLst>
     <pc:chgData name="Welber Tomás de Oliveira" userId="f38840f8-3d24-4281-b69d-7689a1b4043c" providerId="ADAL" clId="{EC4C7D62-60EE-4276-8F0C-02CE07C46A7B}"/>
     <pc:docChg chg="modSld">
-      <pc:chgData name="Welber Tomás de Oliveira" userId="f38840f8-3d24-4281-b69d-7689a1b4043c" providerId="ADAL" clId="{EC4C7D62-60EE-4276-8F0C-02CE07C46A7B}" dt="2026-04-24T19:52:39.684" v="39" actId="20577"/>
+      <pc:chgData name="Welber Tomás de Oliveira" userId="f38840f8-3d24-4281-b69d-7689a1b4043c" providerId="ADAL" clId="{EC4C7D62-60EE-4276-8F0C-02CE07C46A7B}" dt="2026-04-27T12:22:07.815" v="91" actId="20577"/>
       <pc:docMkLst>
         <pc:docMk/>
       </pc:docMkLst>
       <pc:sldChg chg="modSp mod">
-        <pc:chgData name="Welber Tomás de Oliveira" userId="f38840f8-3d24-4281-b69d-7689a1b4043c" providerId="ADAL" clId="{EC4C7D62-60EE-4276-8F0C-02CE07C46A7B}" dt="2026-04-24T19:52:39.684" v="39" actId="20577"/>
+        <pc:chgData name="Welber Tomás de Oliveira" userId="f38840f8-3d24-4281-b69d-7689a1b4043c" providerId="ADAL" clId="{EC4C7D62-60EE-4276-8F0C-02CE07C46A7B}" dt="2026-04-27T12:22:07.815" v="91" actId="20577"/>
         <pc:sldMkLst>
           <pc:docMk/>
           <pc:sldMk cId="0" sldId="256"/>
         </pc:sldMkLst>
         <pc:spChg chg="mod">
-          <ac:chgData name="Welber Tomás de Oliveira" userId="f38840f8-3d24-4281-b69d-7689a1b4043c" providerId="ADAL" clId="{EC4C7D62-60EE-4276-8F0C-02CE07C46A7B}" dt="2026-04-24T19:52:39.684" v="39" actId="20577"/>
+          <ac:chgData name="Welber Tomás de Oliveira" userId="f38840f8-3d24-4281-b69d-7689a1b4043c" providerId="ADAL" clId="{EC4C7D62-60EE-4276-8F0C-02CE07C46A7B}" dt="2026-04-27T12:22:07.815" v="91" actId="20577"/>
           <ac:spMkLst>
             <pc:docMk/>
             <pc:sldMk cId="0" sldId="256"/>
@@ -341,7 +349,7 @@
             <a:fld id="{1D8BD707-D9CF-40AE-B4C6-C98DA3205C09}" type="datetimeFigureOut">
               <a:rPr lang="en-US" smtClean="0"/>
               <a:pPr/>
-              <a:t>4/24/2026</a:t>
+              <a:t>4/27/2026</a:t>
             </a:fld>
             <a:endParaRPr lang="en-US"/>
           </a:p>
@@ -506,7 +514,7 @@
             <a:fld id="{1D8BD707-D9CF-40AE-B4C6-C98DA3205C09}" type="datetimeFigureOut">
               <a:rPr lang="en-US" smtClean="0"/>
               <a:pPr/>
-              <a:t>4/24/2026</a:t>
+              <a:t>4/27/2026</a:t>
             </a:fld>
             <a:endParaRPr lang="en-US"/>
           </a:p>
@@ -681,7 +689,7 @@
             <a:fld id="{1D8BD707-D9CF-40AE-B4C6-C98DA3205C09}" type="datetimeFigureOut">
               <a:rPr lang="en-US" smtClean="0"/>
               <a:pPr/>
-              <a:t>4/24/2026</a:t>
+              <a:t>4/27/2026</a:t>
             </a:fld>
             <a:endParaRPr lang="en-US"/>
           </a:p>
@@ -846,7 +854,7 @@
             <a:fld id="{1D8BD707-D9CF-40AE-B4C6-C98DA3205C09}" type="datetimeFigureOut">
               <a:rPr lang="en-US" smtClean="0"/>
               <a:pPr/>
-              <a:t>4/24/2026</a:t>
+              <a:t>4/27/2026</a:t>
             </a:fld>
             <a:endParaRPr lang="en-US"/>
           </a:p>
@@ -1088,7 +1096,7 @@
             <a:fld id="{1D8BD707-D9CF-40AE-B4C6-C98DA3205C09}" type="datetimeFigureOut">
               <a:rPr lang="en-US" smtClean="0"/>
               <a:pPr/>
-              <a:t>4/24/2026</a:t>
+              <a:t>4/27/2026</a:t>
             </a:fld>
             <a:endParaRPr lang="en-US"/>
           </a:p>
@@ -1370,7 +1378,7 @@
             <a:fld id="{1D8BD707-D9CF-40AE-B4C6-C98DA3205C09}" type="datetimeFigureOut">
               <a:rPr lang="en-US" smtClean="0"/>
               <a:pPr/>
-              <a:t>4/24/2026</a:t>
+              <a:t>4/27/2026</a:t>
             </a:fld>
             <a:endParaRPr lang="en-US"/>
           </a:p>
@@ -1786,7 +1794,7 @@
             <a:fld id="{1D8BD707-D9CF-40AE-B4C6-C98DA3205C09}" type="datetimeFigureOut">
               <a:rPr lang="en-US" smtClean="0"/>
               <a:pPr/>
-              <a:t>4/24/2026</a:t>
+              <a:t>4/27/2026</a:t>
             </a:fld>
             <a:endParaRPr lang="en-US"/>
           </a:p>
@@ -1900,7 +1908,7 @@
             <a:fld id="{1D8BD707-D9CF-40AE-B4C6-C98DA3205C09}" type="datetimeFigureOut">
               <a:rPr lang="en-US" smtClean="0"/>
               <a:pPr/>
-              <a:t>4/24/2026</a:t>
+              <a:t>4/27/2026</a:t>
             </a:fld>
             <a:endParaRPr lang="en-US"/>
           </a:p>
@@ -1992,7 +2000,7 @@
             <a:fld id="{1D8BD707-D9CF-40AE-B4C6-C98DA3205C09}" type="datetimeFigureOut">
               <a:rPr lang="en-US" smtClean="0"/>
               <a:pPr/>
-              <a:t>4/24/2026</a:t>
+              <a:t>4/27/2026</a:t>
             </a:fld>
             <a:endParaRPr lang="en-US"/>
           </a:p>
@@ -2264,7 +2272,7 @@
             <a:fld id="{1D8BD707-D9CF-40AE-B4C6-C98DA3205C09}" type="datetimeFigureOut">
               <a:rPr lang="en-US" smtClean="0"/>
               <a:pPr/>
-              <a:t>4/24/2026</a:t>
+              <a:t>4/27/2026</a:t>
             </a:fld>
             <a:endParaRPr lang="en-US"/>
           </a:p>
@@ -2513,7 +2521,7 @@
             <a:fld id="{1D8BD707-D9CF-40AE-B4C6-C98DA3205C09}" type="datetimeFigureOut">
               <a:rPr lang="en-US" smtClean="0"/>
               <a:pPr/>
-              <a:t>4/24/2026</a:t>
+              <a:t>4/27/2026</a:t>
             </a:fld>
             <a:endParaRPr lang="en-US"/>
           </a:p>
@@ -2721,7 +2729,7 @@
             <a:fld id="{1D8BD707-D9CF-40AE-B4C6-C98DA3205C09}" type="datetimeFigureOut">
               <a:rPr lang="en-US" smtClean="0"/>
               <a:pPr/>
-              <a:t>4/24/2026</a:t>
+              <a:t>4/27/2026</a:t>
             </a:fld>
             <a:endParaRPr lang="en-US"/>
           </a:p>
@@ -3319,7 +3327,7 @@
                   <a:cs typeface="Arial"/>
                   <a:sym typeface="Arial"/>
                 </a:rPr>
-                <a:t>MARÇO </a:t>
+                <a:t>JUNHO </a:t>
               </a:r>
               <a:r>
                 <a:rPr lang="en-US" sz="2246" spc="599" dirty="0">
@@ -5718,7 +5726,12 @@
 
 <file path=customXml/item1.xml><?xml version="1.0" encoding="utf-8"?>
 <p:properties xmlns:p="http://schemas.microsoft.com/office/2006/metadata/properties" xmlns:xsi="http://www.w3.org/2001/XMLSchema-instance" xmlns:pc="http://schemas.microsoft.com/office/infopath/2007/PartnerControls">
-  <documentManagement/>
+  <documentManagement>
+    <lcf76f155ced4ddcb4097134ff3c332f xmlns="7914ab4b-20f4-4087-ab7c-a478fbc5b30a">
+      <Terms xmlns="http://schemas.microsoft.com/office/infopath/2007/PartnerControls"/>
+    </lcf76f155ced4ddcb4097134ff3c332f>
+    <TaxCatchAll xmlns="04d645b9-b00e-4fbc-a94a-2732e6560e9c" xsi:nil="true"/>
+  </documentManagement>
 </p:properties>
 </file>
 
@@ -5732,9 +5745,10 @@
 </file>
 
 <file path=customXml/item3.xml><?xml version="1.0" encoding="utf-8"?>
-<ct:contentTypeSchema xmlns:ct="http://schemas.microsoft.com/office/2006/metadata/contentType" xmlns:ma="http://schemas.microsoft.com/office/2006/metadata/properties/metaAttributes" ct:_="" ma:_="" ma:contentTypeName="Documento" ma:contentTypeID="0x0101005ACD0B3401C10644BD1A825D39D0171F" ma:contentTypeVersion="3" ma:contentTypeDescription="Crie um novo documento." ma:contentTypeScope="" ma:versionID="be2f3855bd5323f10692b28f7c07c004">
-  <xsd:schema xmlns:xsd="http://www.w3.org/2001/XMLSchema" xmlns:xs="http://www.w3.org/2001/XMLSchema" xmlns:p="http://schemas.microsoft.com/office/2006/metadata/properties" xmlns:ns2="7914ab4b-20f4-4087-ab7c-a478fbc5b30a" targetNamespace="http://schemas.microsoft.com/office/2006/metadata/properties" ma:root="true" ma:fieldsID="7d876b22ca955b62b8fd0b10ce27bd4d" ns2:_="">
+<ct:contentTypeSchema xmlns:ct="http://schemas.microsoft.com/office/2006/metadata/contentType" xmlns:ma="http://schemas.microsoft.com/office/2006/metadata/properties/metaAttributes" ct:_="" ma:_="" ma:contentTypeName="Documento" ma:contentTypeID="0x0101005ACD0B3401C10644BD1A825D39D0171F" ma:contentTypeVersion="10" ma:contentTypeDescription="Crie um novo documento." ma:contentTypeScope="" ma:versionID="e79c1efc00bdec1643ed2c2eb6776ac5">
+  <xsd:schema xmlns:xsd="http://www.w3.org/2001/XMLSchema" xmlns:xs="http://www.w3.org/2001/XMLSchema" xmlns:p="http://schemas.microsoft.com/office/2006/metadata/properties" xmlns:ns2="7914ab4b-20f4-4087-ab7c-a478fbc5b30a" xmlns:ns3="04d645b9-b00e-4fbc-a94a-2732e6560e9c" targetNamespace="http://schemas.microsoft.com/office/2006/metadata/properties" ma:root="true" ma:fieldsID="62f3af6391602aded0d4001ac01d6b1e" ns2:_="" ns3:_="">
     <xsd:import namespace="7914ab4b-20f4-4087-ab7c-a478fbc5b30a"/>
+    <xsd:import namespace="04d645b9-b00e-4fbc-a94a-2732e6560e9c"/>
     <xsd:element name="properties">
       <xsd:complexType>
         <xsd:sequence>
@@ -5744,6 +5758,12 @@
                 <xsd:element ref="ns2:MediaServiceMetadata" minOccurs="0"/>
                 <xsd:element ref="ns2:MediaServiceFastMetadata" minOccurs="0"/>
                 <xsd:element ref="ns2:MediaServiceSearchProperties" minOccurs="0"/>
+                <xsd:element ref="ns2:MediaServiceDateTaken" minOccurs="0"/>
+                <xsd:element ref="ns2:lcf76f155ced4ddcb4097134ff3c332f" minOccurs="0"/>
+                <xsd:element ref="ns3:TaxCatchAll" minOccurs="0"/>
+                <xsd:element ref="ns2:MediaServiceOCR" minOccurs="0"/>
+                <xsd:element ref="ns2:MediaServiceGenerationTime" minOccurs="0"/>
+                <xsd:element ref="ns2:MediaServiceEventHashCode" minOccurs="0"/>
               </xsd:all>
             </xsd:complexType>
           </xsd:element>
@@ -5768,6 +5788,50 @@
       <xsd:simpleType>
         <xsd:restriction base="dms:Note"/>
       </xsd:simpleType>
+    </xsd:element>
+    <xsd:element name="MediaServiceDateTaken" ma:index="11" nillable="true" ma:displayName="MediaServiceDateTaken" ma:hidden="true" ma:indexed="true" ma:internalName="MediaServiceDateTaken" ma:readOnly="true">
+      <xsd:simpleType>
+        <xsd:restriction base="dms:Text"/>
+      </xsd:simpleType>
+    </xsd:element>
+    <xsd:element name="lcf76f155ced4ddcb4097134ff3c332f" ma:index="13" nillable="true" ma:taxonomy="true" ma:internalName="lcf76f155ced4ddcb4097134ff3c332f" ma:taxonomyFieldName="MediaServiceImageTags" ma:displayName="Marcações de imagem" ma:readOnly="false" ma:fieldId="{5cf76f15-5ced-4ddc-b409-7134ff3c332f}" ma:taxonomyMulti="true" ma:sspId="e597c33c-ecc2-476f-a0fa-1296a3cd8553" ma:termSetId="09814cd3-568e-fe90-9814-8d621ff8fb84" ma:anchorId="fba54fb3-c3e1-fe81-a776-ca4b69148c4d" ma:open="true" ma:isKeyword="false">
+      <xsd:complexType>
+        <xsd:sequence>
+          <xsd:element ref="pc:Terms" minOccurs="0" maxOccurs="1"/>
+        </xsd:sequence>
+      </xsd:complexType>
+    </xsd:element>
+    <xsd:element name="MediaServiceOCR" ma:index="15" nillable="true" ma:displayName="Extracted Text" ma:internalName="MediaServiceOCR" ma:readOnly="true">
+      <xsd:simpleType>
+        <xsd:restriction base="dms:Note">
+          <xsd:maxLength value="255"/>
+        </xsd:restriction>
+      </xsd:simpleType>
+    </xsd:element>
+    <xsd:element name="MediaServiceGenerationTime" ma:index="16" nillable="true" ma:displayName="MediaServiceGenerationTime" ma:hidden="true" ma:internalName="MediaServiceGenerationTime" ma:readOnly="true">
+      <xsd:simpleType>
+        <xsd:restriction base="dms:Text"/>
+      </xsd:simpleType>
+    </xsd:element>
+    <xsd:element name="MediaServiceEventHashCode" ma:index="17" nillable="true" ma:displayName="MediaServiceEventHashCode" ma:hidden="true" ma:internalName="MediaServiceEventHashCode" ma:readOnly="true">
+      <xsd:simpleType>
+        <xsd:restriction base="dms:Text"/>
+      </xsd:simpleType>
+    </xsd:element>
+  </xsd:schema>
+  <xsd:schema xmlns:xsd="http://www.w3.org/2001/XMLSchema" xmlns:xs="http://www.w3.org/2001/XMLSchema" xmlns:dms="http://schemas.microsoft.com/office/2006/documentManagement/types" xmlns:pc="http://schemas.microsoft.com/office/infopath/2007/PartnerControls" targetNamespace="04d645b9-b00e-4fbc-a94a-2732e6560e9c" elementFormDefault="qualified">
+    <xsd:import namespace="http://schemas.microsoft.com/office/2006/documentManagement/types"/>
+    <xsd:import namespace="http://schemas.microsoft.com/office/infopath/2007/PartnerControls"/>
+    <xsd:element name="TaxCatchAll" ma:index="14" nillable="true" ma:displayName="Taxonomy Catch All Column" ma:hidden="true" ma:list="{0d795891-2052-43b7-9a5f-412de2fdf945}" ma:internalName="TaxCatchAll" ma:showField="CatchAllData" ma:web="04d645b9-b00e-4fbc-a94a-2732e6560e9c">
+      <xsd:complexType>
+        <xsd:complexContent>
+          <xsd:extension base="dms:MultiChoiceLookup">
+            <xsd:sequence>
+              <xsd:element name="Value" type="dms:Lookup" maxOccurs="unbounded" minOccurs="0" nillable="true"/>
+            </xsd:sequence>
+          </xsd:extension>
+        </xsd:complexContent>
+      </xsd:complexType>
     </xsd:element>
   </xsd:schema>
   <xsd:schema xmlns="http://schemas.openxmlformats.org/package/2006/metadata/core-properties" xmlns:xsd="http://www.w3.org/2001/XMLSchema" xmlns:xsi="http://www.w3.org/2001/XMLSchema-instance" xmlns:dc="http://purl.org/dc/elements/1.1/" xmlns:dcterms="http://purl.org/dc/terms/" xmlns:odoc="http://schemas.microsoft.com/internal/obd" targetNamespace="http://schemas.openxmlformats.org/package/2006/metadata/core-properties" elementFormDefault="qualified" attributeFormDefault="unqualified" blockDefault="#all">
@@ -5872,15 +5936,16 @@
 <file path=customXml/itemProps1.xml><?xml version="1.0" encoding="utf-8"?>
 <ds:datastoreItem xmlns:ds="http://schemas.openxmlformats.org/officeDocument/2006/customXml" ds:itemID="{F6F37A08-BE4A-4717-90D4-FCEE36A6AB4A}">
   <ds:schemaRefs>
-    <ds:schemaRef ds:uri="http://www.w3.org/XML/1998/namespace"/>
-    <ds:schemaRef ds:uri="http://purl.org/dc/dcmitype/"/>
+    <ds:schemaRef ds:uri="http://purl.org/dc/terms/"/>
+    <ds:schemaRef ds:uri="7914ab4b-20f4-4087-ab7c-a478fbc5b30a"/>
+    <ds:schemaRef ds:uri="http://schemas.microsoft.com/office/2006/documentManagement/types"/>
     <ds:schemaRef ds:uri="http://schemas.microsoft.com/office/infopath/2007/PartnerControls"/>
     <ds:schemaRef ds:uri="http://schemas.openxmlformats.org/package/2006/metadata/core-properties"/>
     <ds:schemaRef ds:uri="http://purl.org/dc/elements/1.1/"/>
-    <ds:schemaRef ds:uri="http://purl.org/dc/terms/"/>
-    <ds:schemaRef ds:uri="http://schemas.microsoft.com/office/2006/documentManagement/types"/>
-    <ds:schemaRef ds:uri="7914ab4b-20f4-4087-ab7c-a478fbc5b30a"/>
+    <ds:schemaRef ds:uri="04d645b9-b00e-4fbc-a94a-2732e6560e9c"/>
     <ds:schemaRef ds:uri="http://schemas.microsoft.com/office/2006/metadata/properties"/>
+    <ds:schemaRef ds:uri="http://www.w3.org/XML/1998/namespace"/>
+    <ds:schemaRef ds:uri="http://purl.org/dc/dcmitype/"/>
   </ds:schemaRefs>
 </ds:datastoreItem>
 </file>
@@ -5894,13 +5959,14 @@
 </file>
 
 <file path=customXml/itemProps3.xml><?xml version="1.0" encoding="utf-8"?>
-<ds:datastoreItem xmlns:ds="http://schemas.openxmlformats.org/officeDocument/2006/customXml" ds:itemID="{C77FD3FE-EDB7-48B8-A1E1-8480030F0226}">
+<ds:datastoreItem xmlns:ds="http://schemas.openxmlformats.org/officeDocument/2006/customXml" ds:itemID="{6E3F3AC3-301B-47A6-A81C-B7E1D5C9D77E}">
   <ds:schemaRefs>
     <ds:schemaRef ds:uri="http://schemas.microsoft.com/office/2006/metadata/contentType"/>
     <ds:schemaRef ds:uri="http://schemas.microsoft.com/office/2006/metadata/properties/metaAttributes"/>
     <ds:schemaRef ds:uri="http://www.w3.org/2001/XMLSchema"/>
     <ds:schemaRef ds:uri="http://schemas.microsoft.com/office/2006/metadata/properties"/>
     <ds:schemaRef ds:uri="7914ab4b-20f4-4087-ab7c-a478fbc5b30a"/>
+    <ds:schemaRef ds:uri="04d645b9-b00e-4fbc-a94a-2732e6560e9c"/>
     <ds:schemaRef ds:uri="http://schemas.microsoft.com/office/2006/documentManagement/types"/>
     <ds:schemaRef ds:uri="http://schemas.microsoft.com/office/infopath/2007/PartnerControls"/>
     <ds:schemaRef ds:uri="http://schemas.openxmlformats.org/package/2006/metadata/core-properties"/>

--- a/boletim/Boletim Mensal do Mercado de Trabalho.pptx
+++ b/boletim/Boletim Mensal do Mercado de Trabalho.pptx
@@ -7,15 +7,13 @@
   <p:sldIdLst>
     <p:sldId id="256" r:id="rId5"/>
     <p:sldId id="257" r:id="rId6"/>
-    <p:sldId id="258" r:id="rId7"/>
-    <p:sldId id="259" r:id="rId8"/>
   </p:sldIdLst>
   <p:sldSz cx="10058400" cy="7772400"/>
   <p:notesSz cx="6858000" cy="9144000"/>
   <p:embeddedFontLst>
     <p:embeddedFont>
       <p:font typeface="Arial Bold" panose="020B0604020202020204" charset="0"/>
-      <p:regular r:id="rId9"/>
+      <p:regular r:id="rId7"/>
     </p:embeddedFont>
   </p:embeddedFontLst>
   <p:defaultTextStyle>
@@ -3318,18 +3316,6 @@
                 </a:spcBef>
               </a:pPr>
               <a:r>
-                <a:rPr lang="en-US" sz="2246" spc="599">
-                  <a:solidFill>
-                    <a:srgbClr val="87878B"/>
-                  </a:solidFill>
-                  <a:latin typeface="Arial"/>
-                  <a:ea typeface="Arial"/>
-                  <a:cs typeface="Arial"/>
-                  <a:sym typeface="Arial"/>
-                </a:rPr>
-                <a:t>JUNHO </a:t>
-              </a:r>
-              <a:r>
                 <a:rPr lang="en-US" sz="2246" spc="599" dirty="0">
                   <a:solidFill>
                     <a:srgbClr val="87878B"/>
@@ -3339,7 +3325,7 @@
                   <a:cs typeface="Arial"/>
                   <a:sym typeface="Arial"/>
                 </a:rPr>
-                <a:t>DE 2026</a:t>
+                <a:t>FEVEREIRO DE 2026</a:t>
               </a:r>
             </a:p>
           </p:txBody>
@@ -4980,460 +4966,6 @@
         </p:txBody>
       </p:sp>
     </p:spTree>
-  </p:cSld>
-  <p:clrMapOvr>
-    <a:masterClrMapping/>
-  </p:clrMapOvr>
-</p:sld>
-</file>
-
-<file path=ppt/slides/slide3.xml><?xml version="1.0" encoding="utf-8"?>
-<p:sld xmlns:a="http://schemas.openxmlformats.org/drawingml/2006/main" xmlns:r="http://schemas.openxmlformats.org/officeDocument/2006/relationships" xmlns:p="http://schemas.openxmlformats.org/presentationml/2006/main">
-  <p:cSld>
-    <p:spTree>
-      <p:nvGrpSpPr>
-        <p:cNvPr id="1" name="">
-          <a:extLst>
-            <a:ext uri="{FF2B5EF4-FFF2-40B4-BE49-F238E27FC236}">
-              <a16:creationId xmlns:a16="http://schemas.microsoft.com/office/drawing/2014/main" id="{9276CDFD-DA26-B252-0DB5-84E7534388BA}"/>
-            </a:ext>
-          </a:extLst>
-        </p:cNvPr>
-        <p:cNvGrpSpPr/>
-        <p:nvPr/>
-      </p:nvGrpSpPr>
-      <p:grpSpPr>
-        <a:xfrm>
-          <a:off x="0" y="0"/>
-          <a:ext cx="0" cy="0"/>
-          <a:chOff x="0" y="0"/>
-          <a:chExt cx="0" cy="0"/>
-        </a:xfrm>
-      </p:grpSpPr>
-      <p:sp>
-        <p:nvSpPr>
-          <p:cNvPr id="2" name="Freeform 2">
-            <a:extLst>
-              <a:ext uri="{FF2B5EF4-FFF2-40B4-BE49-F238E27FC236}">
-                <a16:creationId xmlns:a16="http://schemas.microsoft.com/office/drawing/2014/main" id="{CF712058-8B13-B134-ACC3-2FD4517F19CB}"/>
-              </a:ext>
-            </a:extLst>
-          </p:cNvPr>
-          <p:cNvSpPr/>
-          <p:nvPr/>
-        </p:nvSpPr>
-        <p:spPr>
-          <a:xfrm>
-            <a:off x="0" y="0"/>
-            <a:ext cx="10058400" cy="7772400"/>
-          </a:xfrm>
-          <a:custGeom>
-            <a:avLst/>
-            <a:gdLst/>
-            <a:ahLst/>
-            <a:cxnLst/>
-            <a:rect l="l" t="t" r="r" b="b"/>
-            <a:pathLst>
-              <a:path w="10058400" h="7772400">
-                <a:moveTo>
-                  <a:pt x="0" y="0"/>
-                </a:moveTo>
-                <a:lnTo>
-                  <a:pt x="10058400" y="0"/>
-                </a:lnTo>
-                <a:lnTo>
-                  <a:pt x="10058400" y="7772400"/>
-                </a:lnTo>
-                <a:lnTo>
-                  <a:pt x="0" y="7772400"/>
-                </a:lnTo>
-                <a:lnTo>
-                  <a:pt x="0" y="0"/>
-                </a:lnTo>
-                <a:close/>
-              </a:path>
-            </a:pathLst>
-          </a:custGeom>
-          <a:blipFill>
-            <a:blip r:embed="rId2"/>
-            <a:stretch>
-              <a:fillRect l="-9399" t="-1470" r="-9399" b="-1470"/>
-            </a:stretch>
-          </a:blipFill>
-        </p:spPr>
-        <p:txBody>
-          <a:bodyPr/>
-          <a:lstStyle/>
-          <a:p>
-            <a:endParaRPr lang="pt-BR"/>
-          </a:p>
-        </p:txBody>
-      </p:sp>
-      <p:sp>
-        <p:nvSpPr>
-          <p:cNvPr id="3" name="Freeform 3">
-            <a:extLst>
-              <a:ext uri="{FF2B5EF4-FFF2-40B4-BE49-F238E27FC236}">
-                <a16:creationId xmlns:a16="http://schemas.microsoft.com/office/drawing/2014/main" id="{7D6831DC-09A0-0B55-D0B9-DFD0C5C61F9A}"/>
-              </a:ext>
-            </a:extLst>
-          </p:cNvPr>
-          <p:cNvSpPr/>
-          <p:nvPr/>
-        </p:nvSpPr>
-        <p:spPr>
-          <a:xfrm rot="-5400000">
-            <a:off x="5029200" y="2429228"/>
-            <a:ext cx="10058400" cy="3242828"/>
-          </a:xfrm>
-          <a:custGeom>
-            <a:avLst/>
-            <a:gdLst/>
-            <a:ahLst/>
-            <a:cxnLst/>
-            <a:rect l="l" t="t" r="r" b="b"/>
-            <a:pathLst>
-              <a:path w="10058400" h="3242828">
-                <a:moveTo>
-                  <a:pt x="0" y="0"/>
-                </a:moveTo>
-                <a:lnTo>
-                  <a:pt x="10058400" y="0"/>
-                </a:lnTo>
-                <a:lnTo>
-                  <a:pt x="10058400" y="3242829"/>
-                </a:lnTo>
-                <a:lnTo>
-                  <a:pt x="0" y="3242829"/>
-                </a:lnTo>
-                <a:lnTo>
-                  <a:pt x="0" y="0"/>
-                </a:lnTo>
-                <a:close/>
-              </a:path>
-            </a:pathLst>
-          </a:custGeom>
-          <a:blipFill>
-            <a:blip>
-              <a:alphaModFix amt="40000"/>
-              <a:extLst>
-                <a:ext uri="{96DAC541-7B7A-43D3-8B79-37D633B846F1}">
-                  <asvg:svgBlip xmlns:asvg="http://schemas.microsoft.com/office/drawing/2016/SVG/main" r:embed="rId3"/>
-                </a:ext>
-              </a:extLst>
-            </a:blip>
-            <a:stretch>
-              <a:fillRect/>
-            </a:stretch>
-          </a:blipFill>
-        </p:spPr>
-        <p:txBody>
-          <a:bodyPr/>
-          <a:lstStyle/>
-          <a:p>
-            <a:endParaRPr lang="pt-BR"/>
-          </a:p>
-        </p:txBody>
-      </p:sp>
-      <p:sp>
-        <p:nvSpPr>
-          <p:cNvPr id="5" name="Freeform 5">
-            <a:extLst>
-              <a:ext uri="{FF2B5EF4-FFF2-40B4-BE49-F238E27FC236}">
-                <a16:creationId xmlns:a16="http://schemas.microsoft.com/office/drawing/2014/main" id="{E535B7C7-2CB5-E4D0-9260-2E6CB74B90D8}"/>
-              </a:ext>
-            </a:extLst>
-          </p:cNvPr>
-          <p:cNvSpPr/>
-          <p:nvPr/>
-        </p:nvSpPr>
-        <p:spPr>
-          <a:xfrm rot="2855406">
-            <a:off x="-2971548" y="5943724"/>
-            <a:ext cx="4469485" cy="1440962"/>
-          </a:xfrm>
-          <a:custGeom>
-            <a:avLst/>
-            <a:gdLst/>
-            <a:ahLst/>
-            <a:cxnLst/>
-            <a:rect l="l" t="t" r="r" b="b"/>
-            <a:pathLst>
-              <a:path w="4469485" h="1440962">
-                <a:moveTo>
-                  <a:pt x="0" y="0"/>
-                </a:moveTo>
-                <a:lnTo>
-                  <a:pt x="4469485" y="0"/>
-                </a:lnTo>
-                <a:lnTo>
-                  <a:pt x="4469485" y="1440962"/>
-                </a:lnTo>
-                <a:lnTo>
-                  <a:pt x="0" y="1440962"/>
-                </a:lnTo>
-                <a:lnTo>
-                  <a:pt x="0" y="0"/>
-                </a:lnTo>
-                <a:close/>
-              </a:path>
-            </a:pathLst>
-          </a:custGeom>
-          <a:blipFill>
-            <a:blip>
-              <a:alphaModFix amt="40000"/>
-              <a:extLst>
-                <a:ext uri="{96DAC541-7B7A-43D3-8B79-37D633B846F1}">
-                  <asvg:svgBlip xmlns:asvg="http://schemas.microsoft.com/office/drawing/2016/SVG/main" r:embed="rId3"/>
-                </a:ext>
-              </a:extLst>
-            </a:blip>
-            <a:stretch>
-              <a:fillRect/>
-            </a:stretch>
-          </a:blipFill>
-        </p:spPr>
-        <p:txBody>
-          <a:bodyPr/>
-          <a:lstStyle/>
-          <a:p>
-            <a:endParaRPr lang="pt-BR"/>
-          </a:p>
-        </p:txBody>
-      </p:sp>
-      <p:sp>
-        <p:nvSpPr>
-          <p:cNvPr id="6" name="Freeform 6">
-            <a:extLst>
-              <a:ext uri="{FF2B5EF4-FFF2-40B4-BE49-F238E27FC236}">
-                <a16:creationId xmlns:a16="http://schemas.microsoft.com/office/drawing/2014/main" id="{3994E1D2-9770-6D21-D010-2141E1D545D0}"/>
-              </a:ext>
-            </a:extLst>
-          </p:cNvPr>
-          <p:cNvSpPr/>
-          <p:nvPr/>
-        </p:nvSpPr>
-        <p:spPr>
-          <a:xfrm rot="9928149">
-            <a:off x="-1147936" y="-747425"/>
-            <a:ext cx="4298383" cy="1385799"/>
-          </a:xfrm>
-          <a:custGeom>
-            <a:avLst/>
-            <a:gdLst/>
-            <a:ahLst/>
-            <a:cxnLst/>
-            <a:rect l="l" t="t" r="r" b="b"/>
-            <a:pathLst>
-              <a:path w="4298383" h="1385799">
-                <a:moveTo>
-                  <a:pt x="0" y="0"/>
-                </a:moveTo>
-                <a:lnTo>
-                  <a:pt x="4298382" y="0"/>
-                </a:lnTo>
-                <a:lnTo>
-                  <a:pt x="4298382" y="1385798"/>
-                </a:lnTo>
-                <a:lnTo>
-                  <a:pt x="0" y="1385798"/>
-                </a:lnTo>
-                <a:lnTo>
-                  <a:pt x="0" y="0"/>
-                </a:lnTo>
-                <a:close/>
-              </a:path>
-            </a:pathLst>
-          </a:custGeom>
-          <a:blipFill>
-            <a:blip>
-              <a:alphaModFix amt="40000"/>
-              <a:extLst>
-                <a:ext uri="{96DAC541-7B7A-43D3-8B79-37D633B846F1}">
-                  <asvg:svgBlip xmlns:asvg="http://schemas.microsoft.com/office/drawing/2016/SVG/main" r:embed="rId3"/>
-                </a:ext>
-              </a:extLst>
-            </a:blip>
-            <a:stretch>
-              <a:fillRect/>
-            </a:stretch>
-          </a:blipFill>
-        </p:spPr>
-        <p:txBody>
-          <a:bodyPr/>
-          <a:lstStyle/>
-          <a:p>
-            <a:endParaRPr lang="pt-BR" dirty="0"/>
-          </a:p>
-        </p:txBody>
-      </p:sp>
-    </p:spTree>
-    <p:extLst>
-      <p:ext uri="{BB962C8B-B14F-4D97-AF65-F5344CB8AC3E}">
-        <p14:creationId xmlns:p14="http://schemas.microsoft.com/office/powerpoint/2010/main" val="699763672"/>
-      </p:ext>
-    </p:extLst>
-  </p:cSld>
-  <p:clrMapOvr>
-    <a:masterClrMapping/>
-  </p:clrMapOvr>
-</p:sld>
-</file>
-
-<file path=ppt/slides/slide4.xml><?xml version="1.0" encoding="utf-8"?>
-<p:sld xmlns:a="http://schemas.openxmlformats.org/drawingml/2006/main" xmlns:r="http://schemas.openxmlformats.org/officeDocument/2006/relationships" xmlns:p="http://schemas.openxmlformats.org/presentationml/2006/main">
-  <p:cSld>
-    <p:spTree>
-      <p:nvGrpSpPr>
-        <p:cNvPr id="1" name="">
-          <a:extLst>
-            <a:ext uri="{FF2B5EF4-FFF2-40B4-BE49-F238E27FC236}">
-              <a16:creationId xmlns:a16="http://schemas.microsoft.com/office/drawing/2014/main" id="{AAE684D2-338B-B5F7-11DE-B114BF5D452D}"/>
-            </a:ext>
-          </a:extLst>
-        </p:cNvPr>
-        <p:cNvGrpSpPr/>
-        <p:nvPr/>
-      </p:nvGrpSpPr>
-      <p:grpSpPr>
-        <a:xfrm>
-          <a:off x="0" y="0"/>
-          <a:ext cx="0" cy="0"/>
-          <a:chOff x="0" y="0"/>
-          <a:chExt cx="0" cy="0"/>
-        </a:xfrm>
-      </p:grpSpPr>
-      <p:sp>
-        <p:nvSpPr>
-          <p:cNvPr id="2" name="Freeform 2">
-            <a:extLst>
-              <a:ext uri="{FF2B5EF4-FFF2-40B4-BE49-F238E27FC236}">
-                <a16:creationId xmlns:a16="http://schemas.microsoft.com/office/drawing/2014/main" id="{7B5E78E4-DD12-6CE5-66DC-F9B10B95AB69}"/>
-              </a:ext>
-            </a:extLst>
-          </p:cNvPr>
-          <p:cNvSpPr/>
-          <p:nvPr/>
-        </p:nvSpPr>
-        <p:spPr>
-          <a:xfrm>
-            <a:off x="0" y="0"/>
-            <a:ext cx="10058400" cy="7772400"/>
-          </a:xfrm>
-          <a:custGeom>
-            <a:avLst/>
-            <a:gdLst/>
-            <a:ahLst/>
-            <a:cxnLst/>
-            <a:rect l="l" t="t" r="r" b="b"/>
-            <a:pathLst>
-              <a:path w="10058400" h="7772400">
-                <a:moveTo>
-                  <a:pt x="0" y="0"/>
-                </a:moveTo>
-                <a:lnTo>
-                  <a:pt x="10058400" y="0"/>
-                </a:lnTo>
-                <a:lnTo>
-                  <a:pt x="10058400" y="7772400"/>
-                </a:lnTo>
-                <a:lnTo>
-                  <a:pt x="0" y="7772400"/>
-                </a:lnTo>
-                <a:lnTo>
-                  <a:pt x="0" y="0"/>
-                </a:lnTo>
-                <a:close/>
-              </a:path>
-            </a:pathLst>
-          </a:custGeom>
-          <a:blipFill>
-            <a:blip r:embed="rId2"/>
-            <a:stretch>
-              <a:fillRect l="-9399" t="-1470" r="-9399" b="-1470"/>
-            </a:stretch>
-          </a:blipFill>
-        </p:spPr>
-        <p:txBody>
-          <a:bodyPr/>
-          <a:lstStyle/>
-          <a:p>
-            <a:endParaRPr lang="pt-BR"/>
-          </a:p>
-        </p:txBody>
-      </p:sp>
-      <p:sp>
-        <p:nvSpPr>
-          <p:cNvPr id="3" name="Freeform 3">
-            <a:extLst>
-              <a:ext uri="{FF2B5EF4-FFF2-40B4-BE49-F238E27FC236}">
-                <a16:creationId xmlns:a16="http://schemas.microsoft.com/office/drawing/2014/main" id="{3182C4E3-26B1-A22E-FA89-1010DB3B5746}"/>
-              </a:ext>
-            </a:extLst>
-          </p:cNvPr>
-          <p:cNvSpPr/>
-          <p:nvPr/>
-        </p:nvSpPr>
-        <p:spPr>
-          <a:xfrm>
-            <a:off x="0" y="6150986"/>
-            <a:ext cx="10058400" cy="3242828"/>
-          </a:xfrm>
-          <a:custGeom>
-            <a:avLst/>
-            <a:gdLst/>
-            <a:ahLst/>
-            <a:cxnLst/>
-            <a:rect l="l" t="t" r="r" b="b"/>
-            <a:pathLst>
-              <a:path w="10058400" h="3242828">
-                <a:moveTo>
-                  <a:pt x="0" y="0"/>
-                </a:moveTo>
-                <a:lnTo>
-                  <a:pt x="10058400" y="0"/>
-                </a:lnTo>
-                <a:lnTo>
-                  <a:pt x="10058400" y="3242829"/>
-                </a:lnTo>
-                <a:lnTo>
-                  <a:pt x="0" y="3242829"/>
-                </a:lnTo>
-                <a:lnTo>
-                  <a:pt x="0" y="0"/>
-                </a:lnTo>
-                <a:close/>
-              </a:path>
-            </a:pathLst>
-          </a:custGeom>
-          <a:blipFill>
-            <a:blip>
-              <a:alphaModFix amt="40000"/>
-              <a:extLst>
-                <a:ext uri="{96DAC541-7B7A-43D3-8B79-37D633B846F1}">
-                  <asvg:svgBlip xmlns:asvg="http://schemas.microsoft.com/office/drawing/2016/SVG/main" r:embed="rId3"/>
-                </a:ext>
-              </a:extLst>
-            </a:blip>
-            <a:stretch>
-              <a:fillRect/>
-            </a:stretch>
-          </a:blipFill>
-        </p:spPr>
-        <p:txBody>
-          <a:bodyPr/>
-          <a:lstStyle/>
-          <a:p>
-            <a:endParaRPr lang="pt-BR"/>
-          </a:p>
-        </p:txBody>
-      </p:sp>
-    </p:spTree>
-    <p:extLst>
-      <p:ext uri="{BB962C8B-B14F-4D97-AF65-F5344CB8AC3E}">
-        <p14:creationId xmlns:p14="http://schemas.microsoft.com/office/powerpoint/2010/main" val="2640284043"/>
-      </p:ext>
-    </p:extLst>
   </p:cSld>
   <p:clrMapOvr>
     <a:masterClrMapping/>
@@ -5725,26 +5257,6 @@
 </file>
 
 <file path=customXml/item1.xml><?xml version="1.0" encoding="utf-8"?>
-<p:properties xmlns:p="http://schemas.microsoft.com/office/2006/metadata/properties" xmlns:xsi="http://www.w3.org/2001/XMLSchema-instance" xmlns:pc="http://schemas.microsoft.com/office/infopath/2007/PartnerControls">
-  <documentManagement>
-    <lcf76f155ced4ddcb4097134ff3c332f xmlns="7914ab4b-20f4-4087-ab7c-a478fbc5b30a">
-      <Terms xmlns="http://schemas.microsoft.com/office/infopath/2007/PartnerControls"/>
-    </lcf76f155ced4ddcb4097134ff3c332f>
-    <TaxCatchAll xmlns="04d645b9-b00e-4fbc-a94a-2732e6560e9c" xsi:nil="true"/>
-  </documentManagement>
-</p:properties>
-</file>
-
-<file path=customXml/item2.xml><?xml version="1.0" encoding="utf-8"?>
-<?mso-contentType ?>
-<FormTemplates xmlns="http://schemas.microsoft.com/sharepoint/v3/contenttype/forms">
-  <Display>DocumentLibraryForm</Display>
-  <Edit>DocumentLibraryForm</Edit>
-  <New>DocumentLibraryForm</New>
-</FormTemplates>
-</file>
-
-<file path=customXml/item3.xml><?xml version="1.0" encoding="utf-8"?>
 <ct:contentTypeSchema xmlns:ct="http://schemas.microsoft.com/office/2006/metadata/contentType" xmlns:ma="http://schemas.microsoft.com/office/2006/metadata/properties/metaAttributes" ct:_="" ma:_="" ma:contentTypeName="Documento" ma:contentTypeID="0x0101005ACD0B3401C10644BD1A825D39D0171F" ma:contentTypeVersion="10" ma:contentTypeDescription="Crie um novo documento." ma:contentTypeScope="" ma:versionID="e79c1efc00bdec1643ed2c2eb6776ac5">
   <xsd:schema xmlns:xsd="http://www.w3.org/2001/XMLSchema" xmlns:xs="http://www.w3.org/2001/XMLSchema" xmlns:p="http://schemas.microsoft.com/office/2006/metadata/properties" xmlns:ns2="7914ab4b-20f4-4087-ab7c-a478fbc5b30a" xmlns:ns3="04d645b9-b00e-4fbc-a94a-2732e6560e9c" targetNamespace="http://schemas.microsoft.com/office/2006/metadata/properties" ma:root="true" ma:fieldsID="62f3af6391602aded0d4001ac01d6b1e" ns2:_="" ns3:_="">
     <xsd:import namespace="7914ab4b-20f4-4087-ab7c-a478fbc5b30a"/>
@@ -5933,32 +5445,27 @@
 </ct:contentTypeSchema>
 </file>
 
-<file path=customXml/itemProps1.xml><?xml version="1.0" encoding="utf-8"?>
-<ds:datastoreItem xmlns:ds="http://schemas.openxmlformats.org/officeDocument/2006/customXml" ds:itemID="{F6F37A08-BE4A-4717-90D4-FCEE36A6AB4A}">
-  <ds:schemaRefs>
-    <ds:schemaRef ds:uri="http://purl.org/dc/terms/"/>
-    <ds:schemaRef ds:uri="7914ab4b-20f4-4087-ab7c-a478fbc5b30a"/>
-    <ds:schemaRef ds:uri="http://schemas.microsoft.com/office/2006/documentManagement/types"/>
-    <ds:schemaRef ds:uri="http://schemas.microsoft.com/office/infopath/2007/PartnerControls"/>
-    <ds:schemaRef ds:uri="http://schemas.openxmlformats.org/package/2006/metadata/core-properties"/>
-    <ds:schemaRef ds:uri="http://purl.org/dc/elements/1.1/"/>
-    <ds:schemaRef ds:uri="04d645b9-b00e-4fbc-a94a-2732e6560e9c"/>
-    <ds:schemaRef ds:uri="http://schemas.microsoft.com/office/2006/metadata/properties"/>
-    <ds:schemaRef ds:uri="http://www.w3.org/XML/1998/namespace"/>
-    <ds:schemaRef ds:uri="http://purl.org/dc/dcmitype/"/>
-  </ds:schemaRefs>
-</ds:datastoreItem>
+<file path=customXml/item2.xml><?xml version="1.0" encoding="utf-8"?>
+<?mso-contentType ?>
+<FormTemplates xmlns="http://schemas.microsoft.com/sharepoint/v3/contenttype/forms">
+  <Display>DocumentLibraryForm</Display>
+  <Edit>DocumentLibraryForm</Edit>
+  <New>DocumentLibraryForm</New>
+</FormTemplates>
 </file>
 
-<file path=customXml/itemProps2.xml><?xml version="1.0" encoding="utf-8"?>
-<ds:datastoreItem xmlns:ds="http://schemas.openxmlformats.org/officeDocument/2006/customXml" ds:itemID="{4CE99030-5A94-4CC8-9763-2B861D572815}">
-  <ds:schemaRefs>
-    <ds:schemaRef ds:uri="http://schemas.microsoft.com/sharepoint/v3/contenttype/forms"/>
-  </ds:schemaRefs>
-</ds:datastoreItem>
+<file path=customXml/item3.xml><?xml version="1.0" encoding="utf-8"?>
+<p:properties xmlns:p="http://schemas.microsoft.com/office/2006/metadata/properties" xmlns:xsi="http://www.w3.org/2001/XMLSchema-instance" xmlns:pc="http://schemas.microsoft.com/office/infopath/2007/PartnerControls">
+  <documentManagement>
+    <lcf76f155ced4ddcb4097134ff3c332f xmlns="7914ab4b-20f4-4087-ab7c-a478fbc5b30a">
+      <Terms xmlns="http://schemas.microsoft.com/office/infopath/2007/PartnerControls"/>
+    </lcf76f155ced4ddcb4097134ff3c332f>
+    <TaxCatchAll xmlns="04d645b9-b00e-4fbc-a94a-2732e6560e9c" xsi:nil="true"/>
+  </documentManagement>
+</p:properties>
 </file>
 
-<file path=customXml/itemProps3.xml><?xml version="1.0" encoding="utf-8"?>
+<file path=customXml/itemProps1.xml><?xml version="1.0" encoding="utf-8"?>
 <ds:datastoreItem xmlns:ds="http://schemas.openxmlformats.org/officeDocument/2006/customXml" ds:itemID="{6E3F3AC3-301B-47A6-A81C-B7E1D5C9D77E}">
   <ds:schemaRefs>
     <ds:schemaRef ds:uri="http://schemas.microsoft.com/office/2006/metadata/contentType"/>
@@ -5975,4 +5482,29 @@
     <ds:schemaRef ds:uri="http://schemas.microsoft.com/internal/obd"/>
   </ds:schemaRefs>
 </ds:datastoreItem>
+</file>
+
+<file path=customXml/itemProps2.xml><?xml version="1.0" encoding="utf-8"?>
+<ds:datastoreItem xmlns:ds="http://schemas.openxmlformats.org/officeDocument/2006/customXml" ds:itemID="{4CE99030-5A94-4CC8-9763-2B861D572815}">
+  <ds:schemaRefs>
+    <ds:schemaRef ds:uri="http://schemas.microsoft.com/sharepoint/v3/contenttype/forms"/>
+  </ds:schemaRefs>
+</ds:datastoreItem>
+</file>
+
+<file path=customXml/itemProps3.xml><?xml version="1.0" encoding="utf-8"?>
+<ds:datastoreItem xmlns:ds="http://schemas.openxmlformats.org/officeDocument/2006/customXml" ds:itemID="{F6F37A08-BE4A-4717-90D4-FCEE36A6AB4A}">
+  <ds:schemaRefs>
+    <ds:schemaRef ds:uri="http://purl.org/dc/terms/"/>
+    <ds:schemaRef ds:uri="http://www.w3.org/XML/1998/namespace"/>
+    <ds:schemaRef ds:uri="http://schemas.microsoft.com/office/infopath/2007/PartnerControls"/>
+    <ds:schemaRef ds:uri="7914ab4b-20f4-4087-ab7c-a478fbc5b30a"/>
+    <ds:schemaRef ds:uri="http://schemas.microsoft.com/office/2006/metadata/properties"/>
+    <ds:schemaRef ds:uri="http://schemas.microsoft.com/office/2006/documentManagement/types"/>
+    <ds:schemaRef ds:uri="http://purl.org/dc/elements/1.1/"/>
+    <ds:schemaRef ds:uri="http://schemas.openxmlformats.org/package/2006/metadata/core-properties"/>
+    <ds:schemaRef ds:uri="04d645b9-b00e-4fbc-a94a-2732e6560e9c"/>
+    <ds:schemaRef ds:uri="http://purl.org/dc/dcmitype/"/>
+  </ds:schemaRefs>
+</ds:datastoreItem>
 </file>